--- a/mkt1107/output/MKT1107_W04_slides.pptx
+++ b/mkt1107/output/MKT1107_W04_slides.pptx
@@ -150,26 +150,26 @@
   <p:extLst>
     <p:ext uri="{521415D9-36F7-43E2-AB2F-B90AF26B5E84}">
       <p14:sectionLst xmlns:p14="http://schemas.microsoft.com/office/powerpoint/2010/main">
-        <p14:section name="Mở đầu" id="{6a0e26e5-7dc0-db41-5f87-1bef8f06799a}">
+        <p14:section name="Mở đầu" id="{42306521-a35d-8a7a-1b18-4c05c74de727}">
           <p14:sldIdLst>
             <p14:sldId id="256"/>
           </p14:sldIdLst>
         </p14:section>
-        <p14:section name="S1 · Khởi động — kiểm tra bài M2" id="{c65cb5a3-9ff5-8414-207f-12195dba5809}">
+        <p14:section name="S1 · Khởi động — kiểm tra bài M2" id="{331a10b9-348f-e913-c855-569ee9970b31}">
           <p14:sldIdLst>
             <p14:sldId id="257"/>
             <p14:sldId id="258"/>
             <p14:sldId id="259"/>
           </p14:sldIdLst>
         </p14:section>
-        <p14:section name="S2 · Câu đố mở đầu" id="{fa92ea2c-697f-e7db-2c60-6a6e2cb203ab}">
+        <p14:section name="S2 · Câu đố mở đầu" id="{ef60f069-d610-cc7c-a767-e66bb430a6d7}">
           <p14:sldIdLst>
             <p14:sldId id="260"/>
             <p14:sldId id="261"/>
             <p14:sldId id="262"/>
           </p14:sldIdLst>
         </p14:section>
-        <p14:section name="S3 · AI là gì, và đã phát triển như thế nào" id="{4f69c083-1d41-1eb5-6df2-801546cbd035}">
+        <p14:section name="S3 · AI là gì, và đã phát triển như thế nào" id="{09764f3e-e039-de40-47a8-87ff40218049}">
           <p14:sldIdLst>
             <p14:sldId id="263"/>
             <p14:sldId id="264"/>
@@ -188,7 +188,7 @@
             <p14:sldId id="277"/>
           </p14:sldIdLst>
         </p14:section>
-        <p14:section name="S5 · Chuỗi giá trị, cấp độ AI, AI trong nghiên cứu thị trường" id="{16cea14d-e442-aaf6-aed7-5345de41d20b}">
+        <p14:section name="S5 · Chuỗi giá trị, cấp độ AI, AI trong nghiên cứu thị trường" id="{075d0120-f8c7-d061-7e56-7a066f7a36cb}">
           <p14:sldIdLst>
             <p14:sldId id="278"/>
             <p14:sldId id="279"/>
@@ -199,7 +199,7 @@
             <p14:sldId id="284"/>
           </p14:sldIdLst>
         </p14:section>
-        <p14:section name="S6 · Ảo giác và cách kiểm chứng" id="{767096a0-2e60-3208-15be-faf577643605}">
+        <p14:section name="S6 · Ảo giác và cách kiểm chứng" id="{6574585b-0c34-a789-f90f-f42e01c5e997}">
           <p14:sldIdLst>
             <p14:sldId id="285"/>
             <p14:sldId id="286"/>
@@ -208,7 +208,7 @@
             <p14:sldId id="289"/>
           </p14:sldIdLst>
         </p14:section>
-        <p14:section name="S7 · Thực hành nhóm" id="{ea5f4ff1-9ab8-c347-cd7b-781f5480f7c4}">
+        <p14:section name="S7 · Thực hành nhóm" id="{a749b9a1-f93f-c8e5-cb9c-ced1cf4021f6}">
           <p14:sldIdLst>
             <p14:sldId id="290"/>
             <p14:sldId id="291"/>
@@ -216,7 +216,7 @@
             <p14:sldId id="293"/>
           </p14:sldIdLst>
         </p14:section>
-        <p14:section name="S8 · Kết buổi" id="{ca5331b8-68b7-86c7-360c-931d5fffc4d9}">
+        <p14:section name="S8 · Kết buổi" id="{36f17cc0-fada-5e85-6885-d497f0f96ad6}">
           <p14:sldIdLst>
             <p14:sldId id="294"/>
             <p14:sldId id="295"/>

--- a/mkt1107/output/MKT1107_W04_slides.pptx
+++ b/mkt1107/output/MKT1107_W04_slides.pptx
@@ -150,26 +150,26 @@
   <p:extLst>
     <p:ext uri="{521415D9-36F7-43E2-AB2F-B90AF26B5E84}">
       <p14:sectionLst xmlns:p14="http://schemas.microsoft.com/office/powerpoint/2010/main">
-        <p14:section name="Mở đầu" id="{42306521-a35d-8a7a-1b18-4c05c74de727}">
+        <p14:section name="Mở đầu" id="{6b64712d-a9a9-8813-0b63-7ab5dfb90e6c}">
           <p14:sldIdLst>
             <p14:sldId id="256"/>
           </p14:sldIdLst>
         </p14:section>
-        <p14:section name="S1 · Khởi động — kiểm tra bài M2" id="{331a10b9-348f-e913-c855-569ee9970b31}">
+        <p14:section name="S1 · Khởi động — kiểm tra bài M2" id="{abacb48b-5a20-9371-6884-dd363048c9e3}">
           <p14:sldIdLst>
             <p14:sldId id="257"/>
             <p14:sldId id="258"/>
             <p14:sldId id="259"/>
           </p14:sldIdLst>
         </p14:section>
-        <p14:section name="S2 · Câu đố mở đầu" id="{ef60f069-d610-cc7c-a767-e66bb430a6d7}">
+        <p14:section name="S2 · Câu đố mở đầu" id="{9c29bd5d-7030-cb4b-73db-adacfdfb5cea}">
           <p14:sldIdLst>
             <p14:sldId id="260"/>
             <p14:sldId id="261"/>
             <p14:sldId id="262"/>
           </p14:sldIdLst>
         </p14:section>
-        <p14:section name="S3 · AI là gì, và đã phát triển như thế nào" id="{09764f3e-e039-de40-47a8-87ff40218049}">
+        <p14:section name="S3 · AI là gì, và đã phát triển như thế nào" id="{31f70743-7297-36c3-fc02-b3c3c50484b2}">
           <p14:sldIdLst>
             <p14:sldId id="263"/>
             <p14:sldId id="264"/>
@@ -188,7 +188,7 @@
             <p14:sldId id="277"/>
           </p14:sldIdLst>
         </p14:section>
-        <p14:section name="S5 · Chuỗi giá trị, cấp độ AI, AI trong nghiên cứu thị trường" id="{075d0120-f8c7-d061-7e56-7a066f7a36cb}">
+        <p14:section name="S5 · Chuỗi giá trị, cấp độ AI, AI trong nghiên cứu thị trường" id="{0c5556f6-0dfc-1c2a-a026-bfd3882bf3c7}">
           <p14:sldIdLst>
             <p14:sldId id="278"/>
             <p14:sldId id="279"/>
@@ -199,7 +199,7 @@
             <p14:sldId id="284"/>
           </p14:sldIdLst>
         </p14:section>
-        <p14:section name="S6 · Ảo giác và cách kiểm chứng" id="{6574585b-0c34-a789-f90f-f42e01c5e997}">
+        <p14:section name="S6 · Ảo giác và cách kiểm chứng" id="{aab4503a-40a0-3663-1eeb-4dbe7f9f9f70}">
           <p14:sldIdLst>
             <p14:sldId id="285"/>
             <p14:sldId id="286"/>
@@ -208,7 +208,7 @@
             <p14:sldId id="289"/>
           </p14:sldIdLst>
         </p14:section>
-        <p14:section name="S7 · Thực hành nhóm" id="{a749b9a1-f93f-c8e5-cb9c-ced1cf4021f6}">
+        <p14:section name="S7 · Thực hành nhóm" id="{1c75689a-d12c-aa30-7e6b-45f60275ba32}">
           <p14:sldIdLst>
             <p14:sldId id="290"/>
             <p14:sldId id="291"/>
@@ -216,7 +216,7 @@
             <p14:sldId id="293"/>
           </p14:sldIdLst>
         </p14:section>
-        <p14:section name="S8 · Kết buổi" id="{36f17cc0-fada-5e85-6885-d497f0f96ad6}">
+        <p14:section name="S8 · Kết buổi" id="{c1b37b30-d848-3642-8088-de9a3f809c35}">
           <p14:sldIdLst>
             <p14:sldId id="294"/>
             <p14:sldId id="295"/>

--- a/mkt1107/output/MKT1107_W04_slides.pptx
+++ b/mkt1107/output/MKT1107_W04_slides.pptx
@@ -150,26 +150,26 @@
   <p:extLst>
     <p:ext uri="{521415D9-36F7-43E2-AB2F-B90AF26B5E84}">
       <p14:sectionLst xmlns:p14="http://schemas.microsoft.com/office/powerpoint/2010/main">
-        <p14:section name="Mở đầu" id="{6b64712d-a9a9-8813-0b63-7ab5dfb90e6c}">
+        <p14:section name="Mở đầu" id="{5a6d0ece-0697-1f9c-6614-bef2835548e4}">
           <p14:sldIdLst>
             <p14:sldId id="256"/>
           </p14:sldIdLst>
         </p14:section>
-        <p14:section name="S1 · Khởi động — kiểm tra bài M2" id="{abacb48b-5a20-9371-6884-dd363048c9e3}">
+        <p14:section name="S1 · Khởi động — kiểm tra bài M2" id="{a3507969-a248-84b9-a2f1-676f0974e53a}">
           <p14:sldIdLst>
             <p14:sldId id="257"/>
             <p14:sldId id="258"/>
             <p14:sldId id="259"/>
           </p14:sldIdLst>
         </p14:section>
-        <p14:section name="S2 · Câu đố mở đầu" id="{9c29bd5d-7030-cb4b-73db-adacfdfb5cea}">
+        <p14:section name="S2 · Câu đố mở đầu" id="{24e5cabb-4fdb-25e7-04ef-1211f5f79e17}">
           <p14:sldIdLst>
             <p14:sldId id="260"/>
             <p14:sldId id="261"/>
             <p14:sldId id="262"/>
           </p14:sldIdLst>
         </p14:section>
-        <p14:section name="S3 · AI là gì, và đã phát triển như thế nào" id="{31f70743-7297-36c3-fc02-b3c3c50484b2}">
+        <p14:section name="S3 · AI là gì, và đã phát triển như thế nào" id="{54bfbc7a-a4f3-799c-67fc-1017eb5a3e40}">
           <p14:sldIdLst>
             <p14:sldId id="263"/>
             <p14:sldId id="264"/>
@@ -188,7 +188,7 @@
             <p14:sldId id="277"/>
           </p14:sldIdLst>
         </p14:section>
-        <p14:section name="S5 · Chuỗi giá trị, cấp độ AI, AI trong nghiên cứu thị trường" id="{0c5556f6-0dfc-1c2a-a026-bfd3882bf3c7}">
+        <p14:section name="S5 · Chuỗi giá trị, cấp độ AI, AI trong nghiên cứu thị trường" id="{5e4a24c1-c16e-c4ae-27ad-b0592ed81b69}">
           <p14:sldIdLst>
             <p14:sldId id="278"/>
             <p14:sldId id="279"/>
@@ -199,7 +199,7 @@
             <p14:sldId id="284"/>
           </p14:sldIdLst>
         </p14:section>
-        <p14:section name="S6 · Ảo giác và cách kiểm chứng" id="{aab4503a-40a0-3663-1eeb-4dbe7f9f9f70}">
+        <p14:section name="S6 · Ảo giác và cách kiểm chứng" id="{0ec13769-7f04-6217-4754-8ef5d9a22d8d}">
           <p14:sldIdLst>
             <p14:sldId id="285"/>
             <p14:sldId id="286"/>
@@ -208,7 +208,7 @@
             <p14:sldId id="289"/>
           </p14:sldIdLst>
         </p14:section>
-        <p14:section name="S7 · Thực hành nhóm" id="{1c75689a-d12c-aa30-7e6b-45f60275ba32}">
+        <p14:section name="S7 · Thực hành nhóm" id="{e9411ff8-bd12-0736-2a2b-7e5030b89b92}">
           <p14:sldIdLst>
             <p14:sldId id="290"/>
             <p14:sldId id="291"/>
@@ -216,7 +216,7 @@
             <p14:sldId id="293"/>
           </p14:sldIdLst>
         </p14:section>
-        <p14:section name="S8 · Kết buổi" id="{c1b37b30-d848-3642-8088-de9a3f809c35}">
+        <p14:section name="S8 · Kết buổi" id="{15423095-1fb2-e209-7524-f905f6b5b215}">
           <p14:sldIdLst>
             <p14:sldId id="294"/>
             <p14:sldId id="295"/>
@@ -6715,7 +6715,7 @@
                           <a:ea typeface="Alexandria" pitchFamily="34" charset="-122"/>
                           <a:cs typeface="Alexandria" pitchFamily="34" charset="-120"/>
                         </a:rPr>
-                        <a:t>Điểm mạnh</a:t>
+                        <a:t>Điểm mạnh</a:t>
                       </a:r>
                       <a:endParaRPr lang="en-US" sz="2400" dirty="0">
                         <a:latin typeface="Alexandria" charset="0"/>
@@ -7743,7 +7743,7 @@
                 <a:ea typeface="Alexandria" pitchFamily="34" charset="-122"/>
                 <a:cs typeface="Alexandria" pitchFamily="34" charset="-120"/>
               </a:rPr>
-              <a:t>Thiên lệch, lạc hậu</a:t>
+              <a:t>Thiên lệch, lạc hậu</a:t>
             </a:r>
             <a:endParaRPr lang="en-US" sz="3200" dirty="0"/>
           </a:p>
@@ -8771,7 +8771,7 @@
                 <a:ea typeface="Alexandria" pitchFamily="34" charset="-122"/>
                 <a:cs typeface="Alexandria" pitchFamily="34" charset="-120"/>
               </a:rPr>
-              <a:t> · AI tạo sinh</a:t>
+              <a:t> · AI tạo sinh</a:t>
             </a:r>
             <a:endParaRPr lang="en-US" sz="2600" dirty="0"/>
           </a:p>
@@ -9347,7 +9347,7 @@
                 <a:ea typeface="Alexandria" pitchFamily="34" charset="-122"/>
                 <a:cs typeface="Alexandria" pitchFamily="34" charset="-120"/>
               </a:rPr>
-              <a:t>Thuật ngữ AI ra đời</a:t>
+              <a:t>Thuật ngữ AI ra đời</a:t>
             </a:r>
             <a:endParaRPr lang="en-US" sz="2400" dirty="0"/>
           </a:p>
@@ -9470,7 +9470,7 @@
                 <a:ea typeface="Alexandria" pitchFamily="34" charset="-122"/>
                 <a:cs typeface="Alexandria" pitchFamily="34" charset="-120"/>
               </a:rPr>
-              <a:t>Hệ chuyên gia</a:t>
+              <a:t>Hệ chuyên gia</a:t>
             </a:r>
             <a:endParaRPr lang="en-US" sz="2800" dirty="0"/>
           </a:p>
@@ -10139,7 +10139,7 @@
                 <a:ea typeface="Alexandria" pitchFamily="34" charset="-122"/>
                 <a:cs typeface="Alexandria" pitchFamily="34" charset="-120"/>
               </a:rPr>
-              <a:t>1990s–2000s: nhiều dữ liệu hơn, máy tính mạnh hơn</a:t>
+              <a:t>1990s–2000s: nhiều dữ liệu hơn, máy tính mạnh hơn</a:t>
             </a:r>
             <a:endParaRPr lang="en-US" sz="2600" dirty="0"/>
           </a:p>
@@ -11508,7 +11508,7 @@
                 <a:ea typeface="Alexandria" pitchFamily="34" charset="-122"/>
                 <a:cs typeface="Alexandria" pitchFamily="34" charset="-120"/>
               </a:rPr>
-              <a:t>Lồng nhau: AI &gt; học máy &gt; học sâu &gt; AI tạo sinh / LLM</a:t>
+              <a:t>Lồng nhau: AI &gt; học máy &gt; học sâu &gt; AI tạo sinh / LLM</a:t>
             </a:r>
             <a:endParaRPr lang="en-US" sz="2600" dirty="0"/>
           </a:p>
@@ -15040,7 +15040,7 @@
                 <a:ea typeface="Alexandria" pitchFamily="34" charset="-122"/>
                 <a:cs typeface="Alexandria" pitchFamily="34" charset="-120"/>
               </a:rPr>
-              <a:t>Chuỗi giá trị, cấp độ AI, AI trong nghiên cứu thị trường</a:t>
+              <a:t>Chuỗi giá trị, cấp độ AI, AI trong nghiên cứu thị trường</a:t>
             </a:r>
             <a:endParaRPr lang="en-US" sz="4100" dirty="0"/>
           </a:p>
@@ -17050,7 +17050,7 @@
                 <a:ea typeface="Alexandria" pitchFamily="34" charset="-122"/>
                 <a:cs typeface="Alexandria" pitchFamily="34" charset="-120"/>
               </a:rPr>
-              <a:t>Máy phản ứng</a:t>
+              <a:t>Máy phản ứng</a:t>
             </a:r>
             <a:endParaRPr lang="en-US" sz="2800" dirty="0"/>
           </a:p>
@@ -17092,7 +17092,7 @@
                 <a:ea typeface="Alexandria" pitchFamily="34" charset="-122"/>
                 <a:cs typeface="Alexandria" pitchFamily="34" charset="-120"/>
               </a:rPr>
-              <a:t>Deep Blue · đã có</a:t>
+              <a:t>Deep Blue · đã có</a:t>
             </a:r>
             <a:endParaRPr lang="en-US" sz="2500" dirty="0"/>
           </a:p>
@@ -17215,7 +17215,7 @@
                 <a:ea typeface="Alexandria" pitchFamily="34" charset="-122"/>
                 <a:cs typeface="Alexandria" pitchFamily="34" charset="-120"/>
               </a:rPr>
-              <a:t>Bộ nhớ hạn chế</a:t>
+              <a:t>Bộ nhớ hạn chế</a:t>
             </a:r>
             <a:endParaRPr lang="en-US" sz="2800" dirty="0"/>
           </a:p>
@@ -17422,7 +17422,7 @@
                 <a:ea typeface="Alexandria" pitchFamily="34" charset="-122"/>
                 <a:cs typeface="Alexandria" pitchFamily="34" charset="-120"/>
               </a:rPr>
-              <a:t>Đang nghiên cứu</a:t>
+              <a:t>Đang nghiên cứu</a:t>
             </a:r>
             <a:endParaRPr lang="en-US" sz="2500" dirty="0"/>
           </a:p>
@@ -17545,7 +17545,7 @@
                 <a:ea typeface="Alexandria" pitchFamily="34" charset="-122"/>
                 <a:cs typeface="Alexandria" pitchFamily="34" charset="-120"/>
               </a:rPr>
-              <a:t>Tự nhận thức</a:t>
+              <a:t>Tự nhận thức</a:t>
             </a:r>
             <a:endParaRPr lang="en-US" sz="2800" dirty="0"/>
           </a:p>
@@ -18156,7 +18156,7 @@
                 <a:ea typeface="Alexandria" pitchFamily="34" charset="-122"/>
                 <a:cs typeface="Alexandria" pitchFamily="34" charset="-120"/>
               </a:rPr>
-              <a:t>Trích dẫn đủ tác giả, DOI</a:t>
+              <a:t>Trích dẫn đủ tác giả, DOI</a:t>
             </a:r>
             <a:endParaRPr lang="en-US" sz="2800" dirty="0"/>
           </a:p>
@@ -19156,7 +19156,7 @@
                 <a:ea typeface="Alexandria" pitchFamily="34" charset="-122"/>
                 <a:cs typeface="Alexandria" pitchFamily="34" charset="-120"/>
               </a:rPr>
-              <a:t>Khảo sát, làm sạch, mã hóa, gom chủ đề ban đầu</a:t>
+              <a:t>Khảo sát, làm sạch, mã hóa, gom chủ đề ban đầu</a:t>
             </a:r>
             <a:endParaRPr lang="en-US" sz="2600" dirty="0"/>
           </a:p>
@@ -19461,7 +19461,7 @@
       </p:sp>
       <p:sp>
         <p:nvSpPr>
-          <p:cNvPr id="6" name="Thẻ Quyền riêng tư"/>
+          <p:cNvPr id="6" name="Thẻ Quyền riêng tư"/>
           <p:cNvSpPr/>
           <p:nvPr/>
         </p:nvSpPr>
@@ -19576,7 +19576,7 @@
                 <a:ea typeface="Alexandria" pitchFamily="34" charset="-122"/>
                 <a:cs typeface="Alexandria" pitchFamily="34" charset="-120"/>
               </a:rPr>
-              <a:t>Quyền riêng tư</a:t>
+              <a:t>Quyền riêng tư</a:t>
             </a:r>
             <a:endParaRPr lang="en-US" sz="2800" dirty="0"/>
           </a:p>
@@ -19791,7 +19791,7 @@
       </p:sp>
       <p:sp>
         <p:nvSpPr>
-          <p:cNvPr id="16" name="Thẻ Thiếu minh bạch"/>
+          <p:cNvPr id="16" name="Thẻ Thiếu minh bạch"/>
           <p:cNvSpPr/>
           <p:nvPr/>
         </p:nvSpPr>
@@ -19906,7 +19906,7 @@
                 <a:ea typeface="Alexandria" pitchFamily="34" charset="-122"/>
                 <a:cs typeface="Alexandria" pitchFamily="34" charset="-120"/>
               </a:rPr>
-              <a:t>Thiếu minh bạch</a:t>
+              <a:t>Thiếu minh bạch</a:t>
             </a:r>
             <a:endParaRPr lang="en-US" sz="2800" dirty="0"/>
           </a:p>
@@ -20514,7 +20514,7 @@
                           <a:ea typeface="Alexandria" pitchFamily="34" charset="-122"/>
                           <a:cs typeface="Alexandria" pitchFamily="34" charset="-120"/>
                         </a:rPr>
-                        <a:t>Tên tác giả Việt</a:t>
+                        <a:t>Tên tác giả Việt</a:t>
                       </a:r>
                       <a:endParaRPr lang="en-US" sz="2400" dirty="0">
                         <a:latin typeface="Alexandria" charset="0"/>
@@ -21015,7 +21015,7 @@
                           <a:ea typeface="Alexandria" pitchFamily="34" charset="-122"/>
                           <a:cs typeface="Alexandria" pitchFamily="34" charset="-120"/>
                         </a:rPr>
-                        <a:t>Trích trong bài, thiếu trong danh mục</a:t>
+                        <a:t>Trích trong bài, thiếu trong danh mục</a:t>
                       </a:r>
                       <a:endParaRPr lang="en-US" sz="2400" dirty="0">
                         <a:latin typeface="Alexandria" charset="0"/>
@@ -21086,7 +21086,7 @@
                           <a:ea typeface="Alexandria" pitchFamily="34" charset="-122"/>
                           <a:cs typeface="Alexandria" pitchFamily="34" charset="-120"/>
                         </a:rPr>
-                        <a:t>Mỗi trích dẫn một mục</a:t>
+                        <a:t>Mỗi trích dẫn một mục</a:t>
                       </a:r>
                       <a:endParaRPr lang="en-US" sz="2400" dirty="0">
                         <a:latin typeface="Alexandria" charset="0"/>
@@ -21554,7 +21554,7 @@
                 <a:ea typeface="Alexandria" pitchFamily="34" charset="-122"/>
                 <a:cs typeface="Alexandria" pitchFamily="34" charset="-120"/>
               </a:rPr>
-              <a:t>Ảo giác và cách kiểm chứng</a:t>
+              <a:t>Ảo giác và cách kiểm chứng</a:t>
             </a:r>
             <a:endParaRPr lang="en-US" sz="4400" dirty="0"/>
           </a:p>
@@ -23261,7 +23261,7 @@
                 <a:ea typeface="Alexandria" pitchFamily="34" charset="-122"/>
                 <a:cs typeface="Alexandria" pitchFamily="34" charset="-120"/>
               </a:rPr>
-              <a:t>Đúng chi tiết?</a:t>
+              <a:t>Đúng chi tiết?</a:t>
             </a:r>
             <a:endParaRPr lang="en-US" sz="2800" dirty="0"/>
           </a:p>
@@ -23426,7 +23426,7 @@
                 <a:ea typeface="Alexandria" pitchFamily="34" charset="-122"/>
                 <a:cs typeface="Alexandria" pitchFamily="34" charset="-120"/>
               </a:rPr>
-              <a:t>DOI đúng bài?</a:t>
+              <a:t>DOI đúng bài?</a:t>
             </a:r>
             <a:endParaRPr lang="en-US" sz="2800" dirty="0"/>
           </a:p>
@@ -23468,7 +23468,7 @@
                 <a:ea typeface="Alexandria" pitchFamily="34" charset="-122"/>
                 <a:cs typeface="Alexandria" pitchFamily="34" charset="-120"/>
               </a:rPr>
-              <a:t>Mở doi.org + DOI</a:t>
+              <a:t>Mở doi.org + DOI</a:t>
             </a:r>
             <a:endParaRPr lang="en-US" sz="2600" dirty="0"/>
           </a:p>
@@ -23591,7 +23591,7 @@
                 <a:ea typeface="Alexandria" pitchFamily="34" charset="-122"/>
                 <a:cs typeface="Alexandria" pitchFamily="34" charset="-120"/>
               </a:rPr>
-              <a:t>Nội dung đúng?</a:t>
+              <a:t>Nội dung đúng?</a:t>
             </a:r>
             <a:endParaRPr lang="en-US" sz="2800" dirty="0"/>
           </a:p>
@@ -24260,7 +24260,7 @@
                 <a:ea typeface="Alexandria" pitchFamily="34" charset="-122"/>
                 <a:cs typeface="Alexandria" pitchFamily="34" charset="-120"/>
               </a:rPr>
-              <a:t>Ngày nhóm dùng AI</a:t>
+              <a:t>Ngày nhóm dùng AI</a:t>
             </a:r>
             <a:endParaRPr lang="en-US" sz="2600" dirty="0"/>
           </a:p>
@@ -24590,7 +24590,7 @@
                 <a:ea typeface="Alexandria" pitchFamily="34" charset="-122"/>
                 <a:cs typeface="Alexandria" pitchFamily="34" charset="-120"/>
               </a:rPr>
-              <a:t>Tóm tắt AI trả về gì</a:t>
+              <a:t>Tóm tắt AI trả về gì</a:t>
             </a:r>
             <a:endParaRPr lang="en-US" sz="2600" dirty="0"/>
           </a:p>
@@ -24920,7 +24920,7 @@
                 <a:ea typeface="Alexandria" pitchFamily="34" charset="-122"/>
                 <a:cs typeface="Alexandria" pitchFamily="34" charset="-120"/>
               </a:rPr>
-              <a:t>Phần đã sửa, đã bỏ</a:t>
+              <a:t>Phần đã sửa, đã bỏ</a:t>
             </a:r>
             <a:endParaRPr lang="en-US" sz="2600" dirty="0"/>
           </a:p>
@@ -30078,7 +30078,7 @@
                 <a:ea typeface="Alexandria" pitchFamily="34" charset="-122"/>
                 <a:cs typeface="Alexandria" pitchFamily="34" charset="-120"/>
               </a:rPr>
-              <a:t>Câu lệnh theo khung</a:t>
+              <a:t>Câu lệnh theo khung</a:t>
             </a:r>
             <a:endParaRPr lang="en-US" sz="2600" dirty="0"/>
           </a:p>
@@ -32317,7 +32317,7 @@
                 <a:ea typeface="Alexandria" pitchFamily="34" charset="-122"/>
                 <a:cs typeface="Alexandria" pitchFamily="34" charset="-120"/>
               </a:rPr>
-              <a:t>Khái niệm, lịch sử, chuỗi giá trị, phân loại</a:t>
+              <a:t>Khái niệm, lịch sử, chuỗi giá trị, phân loại</a:t>
             </a:r>
             <a:endParaRPr lang="en-US" sz="2600" dirty="0"/>
           </a:p>
@@ -32482,7 +32482,7 @@
                 <a:ea typeface="Alexandria" pitchFamily="34" charset="-122"/>
                 <a:cs typeface="Alexandria" pitchFamily="34" charset="-120"/>
               </a:rPr>
-              <a:t>Ảo giác và cách kiểm chứng trích dẫn</a:t>
+              <a:t>Ảo giác và cách kiểm chứng trích dẫn</a:t>
             </a:r>
             <a:endParaRPr lang="en-US" sz="2600" dirty="0"/>
           </a:p>
@@ -32647,7 +32647,7 @@
                 <a:ea typeface="Alexandria" pitchFamily="34" charset="-122"/>
                 <a:cs typeface="Alexandria" pitchFamily="34" charset="-120"/>
               </a:rPr>
-              <a:t>Hồi II–III: ưu, nhược điểm, công cụ, câu lệnh</a:t>
+              <a:t>Hồi II–III: ưu, nhược điểm, công cụ, câu lệnh</a:t>
             </a:r>
             <a:endParaRPr lang="en-US" sz="2600" dirty="0"/>
           </a:p>

--- a/mkt1107/output/MKT1107_W04_slides.pptx
+++ b/mkt1107/output/MKT1107_W04_slides.pptx
@@ -150,26 +150,26 @@
   <p:extLst>
     <p:ext uri="{521415D9-36F7-43E2-AB2F-B90AF26B5E84}">
       <p14:sectionLst xmlns:p14="http://schemas.microsoft.com/office/powerpoint/2010/main">
-        <p14:section name="Mở đầu" id="{5a6d0ece-0697-1f9c-6614-bef2835548e4}">
+        <p14:section name="Mở đầu" id="{b72562c8-ebbf-c3a9-ca73-bec14459b1a4}">
           <p14:sldIdLst>
             <p14:sldId id="256"/>
           </p14:sldIdLst>
         </p14:section>
-        <p14:section name="S1 · Khởi động — kiểm tra bài M2" id="{a3507969-a248-84b9-a2f1-676f0974e53a}">
+        <p14:section name="S1 · Khởi động — kiểm tra bài M2" id="{55bcb474-6343-06c5-2920-f454fd4f4aaa}">
           <p14:sldIdLst>
             <p14:sldId id="257"/>
             <p14:sldId id="258"/>
             <p14:sldId id="259"/>
           </p14:sldIdLst>
         </p14:section>
-        <p14:section name="S2 · Câu đố mở đầu" id="{24e5cabb-4fdb-25e7-04ef-1211f5f79e17}">
+        <p14:section name="S2 · Câu đố mở đầu" id="{f88ba9a5-6618-2ce8-f580-6ee65533fb8f}">
           <p14:sldIdLst>
             <p14:sldId id="260"/>
             <p14:sldId id="261"/>
             <p14:sldId id="262"/>
           </p14:sldIdLst>
         </p14:section>
-        <p14:section name="S3 · AI là gì, và đã phát triển như thế nào" id="{54bfbc7a-a4f3-799c-67fc-1017eb5a3e40}">
+        <p14:section name="S3 · AI là gì, và đã phát triển như thế nào" id="{219fb239-3ad3-5ddf-f3cf-cc73660bbec2}">
           <p14:sldIdLst>
             <p14:sldId id="263"/>
             <p14:sldId id="264"/>
@@ -188,7 +188,7 @@
             <p14:sldId id="277"/>
           </p14:sldIdLst>
         </p14:section>
-        <p14:section name="S5 · Chuỗi giá trị, cấp độ AI, AI trong nghiên cứu thị trường" id="{5e4a24c1-c16e-c4ae-27ad-b0592ed81b69}">
+        <p14:section name="S5 · Chuỗi giá trị, cấp độ AI, AI trong nghiên cứu thị trường" id="{0e1ad94f-e152-ca93-cf70-34fd744a936b}">
           <p14:sldIdLst>
             <p14:sldId id="278"/>
             <p14:sldId id="279"/>
@@ -199,7 +199,7 @@
             <p14:sldId id="284"/>
           </p14:sldIdLst>
         </p14:section>
-        <p14:section name="S6 · Ảo giác và cách kiểm chứng" id="{0ec13769-7f04-6217-4754-8ef5d9a22d8d}">
+        <p14:section name="S6 · Ảo giác và cách kiểm chứng" id="{73093afd-b9ce-f6ae-e065-281f57fa8703}">
           <p14:sldIdLst>
             <p14:sldId id="285"/>
             <p14:sldId id="286"/>
@@ -208,7 +208,7 @@
             <p14:sldId id="289"/>
           </p14:sldIdLst>
         </p14:section>
-        <p14:section name="S7 · Thực hành nhóm" id="{e9411ff8-bd12-0736-2a2b-7e5030b89b92}">
+        <p14:section name="S7 · Thực hành nhóm" id="{14b1c1a8-14c8-3cc1-c9fb-d04593c45b59}">
           <p14:sldIdLst>
             <p14:sldId id="290"/>
             <p14:sldId id="291"/>
@@ -216,7 +216,7 @@
             <p14:sldId id="293"/>
           </p14:sldIdLst>
         </p14:section>
-        <p14:section name="S8 · Kết buổi" id="{15423095-1fb2-e209-7524-f905f6b5b215}">
+        <p14:section name="S8 · Kết buổi" id="{1fe03033-4945-2da9-7d45-d1abeffdb459}">
           <p14:sldIdLst>
             <p14:sldId id="294"/>
             <p14:sldId id="295"/>
@@ -6715,7 +6715,7 @@
                           <a:ea typeface="Alexandria" pitchFamily="34" charset="-122"/>
                           <a:cs typeface="Alexandria" pitchFamily="34" charset="-120"/>
                         </a:rPr>
-                        <a:t>Điểm mạnh</a:t>
+                        <a:t>Điểm mạnh</a:t>
                       </a:r>
                       <a:endParaRPr lang="en-US" sz="2400" dirty="0">
                         <a:latin typeface="Alexandria" charset="0"/>
@@ -13499,8 +13499,8 @@
             <a:tbl>
               <a:tblPr/>
               <a:tblGrid>
-                <a:gridCol w="5021072"/>
-                <a:gridCol w="6043168"/>
+                <a:gridCol w="5093971"/>
+                <a:gridCol w="5970269"/>
               </a:tblGrid>
               <a:tr h="524256">
                 <a:tc>
@@ -20274,9 +20274,9 @@
             <a:tbl>
               <a:tblPr/>
               <a:tblGrid>
-                <a:gridCol w="2236965"/>
-                <a:gridCol w="5473866"/>
-                <a:gridCol w="3353409"/>
+                <a:gridCol w="2298807"/>
+                <a:gridCol w="5435517"/>
+                <a:gridCol w="3329916"/>
               </a:tblGrid>
               <a:tr h="524256">
                 <a:tc>

--- a/mkt1107/output/MKT1107_W04_slides.pptx
+++ b/mkt1107/output/MKT1107_W04_slides.pptx
@@ -150,26 +150,26 @@
   <p:extLst>
     <p:ext uri="{521415D9-36F7-43E2-AB2F-B90AF26B5E84}">
       <p14:sectionLst xmlns:p14="http://schemas.microsoft.com/office/powerpoint/2010/main">
-        <p14:section name="Mở đầu" id="{b72562c8-ebbf-c3a9-ca73-bec14459b1a4}">
+        <p14:section name="Mở đầu" id="{8cae176e-9e3a-a938-71ae-d9bde1a79dd5}">
           <p14:sldIdLst>
             <p14:sldId id="256"/>
           </p14:sldIdLst>
         </p14:section>
-        <p14:section name="S1 · Khởi động — kiểm tra bài M2" id="{55bcb474-6343-06c5-2920-f454fd4f4aaa}">
+        <p14:section name="S1 · Khởi động — kiểm tra bài M2" id="{7e84732d-94bd-8ef0-1a35-c1678a16d660}">
           <p14:sldIdLst>
             <p14:sldId id="257"/>
             <p14:sldId id="258"/>
             <p14:sldId id="259"/>
           </p14:sldIdLst>
         </p14:section>
-        <p14:section name="S2 · Câu đố mở đầu" id="{f88ba9a5-6618-2ce8-f580-6ee65533fb8f}">
+        <p14:section name="S2 · Câu đố mở đầu" id="{ef7a4515-3158-c9cf-c7f8-ce01abd8fc47}">
           <p14:sldIdLst>
             <p14:sldId id="260"/>
             <p14:sldId id="261"/>
             <p14:sldId id="262"/>
           </p14:sldIdLst>
         </p14:section>
-        <p14:section name="S3 · AI là gì, và đã phát triển như thế nào" id="{219fb239-3ad3-5ddf-f3cf-cc73660bbec2}">
+        <p14:section name="S3 · AI là gì, và đã phát triển như thế nào" id="{68040721-b998-910a-3564-70cf4b2ed428}">
           <p14:sldIdLst>
             <p14:sldId id="263"/>
             <p14:sldId id="264"/>
@@ -188,7 +188,7 @@
             <p14:sldId id="277"/>
           </p14:sldIdLst>
         </p14:section>
-        <p14:section name="S5 · Chuỗi giá trị, cấp độ AI, AI trong nghiên cứu thị trường" id="{0e1ad94f-e152-ca93-cf70-34fd744a936b}">
+        <p14:section name="S5 · Chuỗi giá trị, cấp độ AI, AI trong nghiên cứu thị trường" id="{602875c6-c846-7c2c-58e0-883ab8853aa4}">
           <p14:sldIdLst>
             <p14:sldId id="278"/>
             <p14:sldId id="279"/>
@@ -199,7 +199,7 @@
             <p14:sldId id="284"/>
           </p14:sldIdLst>
         </p14:section>
-        <p14:section name="S6 · Ảo giác và cách kiểm chứng" id="{73093afd-b9ce-f6ae-e065-281f57fa8703}">
+        <p14:section name="S6 · Ảo giác và cách kiểm chứng" id="{6781ef08-32d8-0642-4d28-ffd85f3fdf0c}">
           <p14:sldIdLst>
             <p14:sldId id="285"/>
             <p14:sldId id="286"/>
@@ -208,7 +208,7 @@
             <p14:sldId id="289"/>
           </p14:sldIdLst>
         </p14:section>
-        <p14:section name="S7 · Thực hành nhóm" id="{14b1c1a8-14c8-3cc1-c9fb-d04593c45b59}">
+        <p14:section name="S7 · Thực hành nhóm" id="{962698c6-03b6-10c3-022a-4da635f2bcb5}">
           <p14:sldIdLst>
             <p14:sldId id="290"/>
             <p14:sldId id="291"/>
@@ -216,7 +216,7 @@
             <p14:sldId id="293"/>
           </p14:sldIdLst>
         </p14:section>
-        <p14:section name="S8 · Kết buổi" id="{1fe03033-4945-2da9-7d45-d1abeffdb459}">
+        <p14:section name="S8 · Kết buổi" id="{394af03d-7917-05ca-de1d-65cc79dad93f}">
           <p14:sldIdLst>
             <p14:sldId id="294"/>
             <p14:sldId id="295"/>
@@ -1460,7 +1460,8 @@
           <a:p>
             <a:r>
               <a:rPr lang="en-US" dirty="0"/>
-              <a:t>Kiểm tra nhanh “Luật hay học?”, khoảng 5 phút (phút 43–48).
+              <a:t>Thời gian: mỗi tình huống 20 giây bàn với bạn.
+Kiểm tra nhanh “Luật hay học?”, khoảng 5 phút (phút 43–48).
 Giải thích quy ước: 1 ngón là lập trình truyền thống — luật do con người viết; 2 ngón là học máy — máy tự rút quy tắc từ dữ liệu.
 Cách chơi: chiếu lần lượt 5 tình huống. Mỗi tình huống, cặp bạn ngồi cạnh nhau bàn 20 giây, rồi giảng viên đếm 3–2–1 và cả lớp giơ tay cùng lúc. Giơ cùng lúc để không ai nhìn theo bạn bên cạnh.
 Gợi ý câu hỏi phân biệt, viết lên bảng: “Ai viết ra quy tắc — người hay máy?”
@@ -1646,7 +1647,8 @@
           <a:p>
             <a:r>
               <a:rPr lang="en-US" dirty="0"/>
-              <a:t>Tám phút đầu nhìn lại M2 — danh mục tài liệu APA 7 cộng tổng quan tài liệu 1 trang — đã nộp trên LMS sau Buổi 3.
+              <a:t>Thời gian: phút 0–8 của buổi học.
+Tám phút đầu nhìn lại M2 — danh mục tài liệu APA 7 cộng tổng quan tài liệu 1 trang — đã nộp trên LMS sau Buổi 3.
 Trước buổi học, giảng viên lướt nhanh các bài nộp để lấy ba lỗi phổ biến nhất. Không nêu tên nhóm nào trước lớp, kể cả nhóm chưa nộp — nhắc riêng sau giờ.
 Nói: “Trước khi vào bài mới, mình nhìn lại M2. Tôi đã lướt qua các bài nộp; phản hồi chi tiết từng nhóm sẽ có trên LMS. Hôm nay tôi chỉ nêu ba lỗi gặp nhiều nhất, để các nhóm tự sửa ngay — vì danh mục này sẽ đi tiếp vào M3.”
 Lưu ý cho giảng viên: cần quyết định thời điểm trả phản hồi M2 trên LMS — đề xuất trước Buổi 5 để nhóm dùng cho M3.</a:t>
@@ -1925,7 +1927,8 @@
           <a:p>
             <a:r>
               <a:rPr lang="en-US" dirty="0"/>
-              <a:t>Giải lao 15 phút (phút 48–63). Điền giờ quay lại trước khi chiếu.
+              <a:t>Thời gian: giải lao 15 phút.
+Giải lao 15 phút (phút 48–63). Điền giờ quay lại trước khi chiếu.
 Nhắc trước khi nghỉ: “Sau giải lao, mỗi nhóm mở sẵn Google Scholar trên máy — mình sẽ dùng ở phần kiểm chứng.”
 Việc của giảng viên trong giờ giải lao: kiểm tra wifi; mở sẵn Google Scholar trên máy chiếu cho phần làm mẫu ở S6; chuẩn bị ảnh chụp màn hình dự phòng nếu mất mạng; đặt sẵn bản in phụ lục B (câu trả lời AI mẫu) cho các nhóm không có chatbot.
 Lưu ý cho giảng viên: giờ quay lại để trống “…” — điền theo giờ thực tế của lớp.</a:t>
@@ -2016,7 +2019,8 @@
           <a:p>
             <a:r>
               <a:rPr lang="en-US" dirty="0"/>
-              <a:t>Hai mươi phút: chuỗi giá trị của AI (khoảng 7 phút), các cấp độ của AI (khoảng 7 phút), và giới thiệu AI trong nghiên cứu thị trường cùng ba rủi ro đạo đức (khoảng 6 phút).
+              <a:t>Thời gian: phút 63–83 của buổi học.
+Hai mươi phút: chuỗi giá trị của AI (khoảng 7 phút), các cấp độ của AI (khoảng 7 phút), và giới thiệu AI trong nghiên cứu thị trường cùng ba rủi ro đạo đức (khoảng 6 phút).
 Phần này ở mức giới thiệu — Buổi 5 học sâu hơn về ứng dụng, ưu nhược điểm và công cụ.
 Câu dẫn: “Trước giải lao, mình đã thấy AI học từ dữ liệu. Bây giờ nhìn rộng hơn: chatbot các bạn dùng nằm ở đâu trong cả một chuỗi, và nó thông minh đến mức nào.”
 Lưu ý cho giảng viên: phần này dựa trên slide UEF #5 (sửa theo tài liệu học tập), UEF #6, và video “Unlock AI's Potential in Market Research” — video nói ở mức nguyên tắc, không nêu tên doanh nghiệp hay số liệu.</a:t>
@@ -2756,7 +2760,8 @@
           <a:p>
             <a:r>
               <a:rPr lang="en-US" dirty="0"/>
-              <a:t>Mười hai phút: ảo giác là gì và bốn kiểu trích dẫn sai (khoảng 4 phút); quy trình kiểm chứng 4 bước, giảng viên làm mẫu trực tiếp trên Google Scholar (khoảng 6 phút); mẫu nhật ký AI (khoảng 2 phút).
+              <a:t>Thời gian: phút 83–95 của buổi học.
+Mười hai phút: ảo giác là gì và bốn kiểu trích dẫn sai (khoảng 4 phút); quy trình kiểm chứng 4 bước, giảng viên làm mẫu trực tiếp trên Google Scholar (khoảng 6 phút); mẫu nhật ký AI (khoảng 2 phút).
 Đây là phần nối trực tiếp với thực hành 45 phút sau đó — sinh viên mở sẵn Google Scholar và phiếu hoạt động để theo dõi phần làm mẫu.
 Chuẩn bị: Google Scholar đã mở trên máy chiếu; trích dẫn 4 của phụ lục B để làm mẫu; ảnh chụp màn hình dự phòng nếu mất mạng.
 Lưu ý cho giảng viên: phần này dùng slide UEF #7 (chỉ ô “Ảo giác AI” trong cột hạn chế) và ô cảnh báo của UEF #12; cả slide ưu/nhược điểm học ở Buổi 5.</a:t>
@@ -3214,7 +3219,8 @@
           <a:p>
             <a:r>
               <a:rPr lang="en-US" dirty="0"/>
-              <a:t>Thực hành nhóm “Kiểm chứng AI”, 45 phút.
+              <a:t>Thời gian: phút 95–140 của buổi học.
+Thực hành nhóm “Kiểm chứng AI”, 45 phút.
 Kịch bản mở đầu: “45 phút tới, mỗi nhóm sẽ làm đúng việc mà các bạn sẽ làm khi viết M3: nhờ AI tìm tài liệu — rồi không tin ngay. Mỗi nhóm dùng một chatbot mà một bạn trong nhóm đã có tài khoản miễn phí; không cần đăng ký thêm gì. Nhóm nào không có, giơ tay — tôi đưa câu trả lời mẫu. Câu lệnh mẫu có trên phiếu, thay đề tài của nhóm vào. Quan trọng nhất là chặng 2: kiểm chứng từng trích dẫn, đủ 4 bước, có link làm bằng chứng. Cuối giờ tôi sẽ hỏi: AI đưa cho nhóm bao nhiêu trích dẫn, bao nhiêu cái đúng. Bắt đầu.”
 Lưu ý cho giảng viên: kịch bản đầy đủ, bảng kiểm chứng, mẫu nhật ký và đáp án phụ lục B nằm trong phiếu hoạt động “Kiểm chứng AI”.</a:t>
             </a:r>
@@ -3304,7 +3310,9 @@
           <a:p>
             <a:r>
               <a:rPr lang="en-US" dirty="0"/>
-              <a:t>Để slide này trên màn hình suốt 45 phút.
+              <a:t>Thời gian: 45 phút.
+Phân bổ thời gian — chặng 1: 8 phút; chặng 2: 22 phút; chặng 3: 7 phút; chặng 4: 8 phút.
+Để slide này trên màn hình suốt 45 phút.
 Chặng 1 (phút 95–103): nhóm chọn một chatbot mà một thành viên đã có tài khoản miễn phí — không tạo tài khoản mới, không dùng công cụ trả phí; không có chatbot thì dùng câu trả lời mẫu ở phụ lục B. Đi kiểm tra câu lệnh có thay đề tài thật của nhóm; nhắc không đưa thông tin cá nhân vào câu lệnh.
 Chặng 2 (103–125): báo chuyển, nhắc “mỗi trích dẫn có một người phụ trách”. Ưu tiên nhóm đang bí ở bước 1. Nhóm kết luận “bịa” chỉ vì không thấy ngay trên Scholar: hỏi đã tìm theo tác giả chưa, đã thử trang tạp chí chưa — ghi “không xác minh được”, không ghi “bịa”. Chatbot có tìm kiếm web: nhóm vẫn làm bước 2 và 4. Ghi chú 4–5 nhóm có ví dụ sai điển hình để mời chia sẻ.
 Chặng 3 (125–132): nhắc ghi cột “cách kiểm chứng” cụ thể. Phút 131 báo còn 1 phút.
@@ -3581,7 +3589,8 @@
           <a:p>
             <a:r>
               <a:rPr lang="en-US" dirty="0"/>
-              <a:t>Kết buổi khoảng 7 phút: phiếu ra về, giao M3, và nối sang Buổi 5. Còn khoảng 3 phút dự phòng cuối buổi (147–150).
+              <a:t>Thời gian: phút 140–147 của buổi học.
+Kết buổi khoảng 7 phút: phiếu ra về, giao M3, và nối sang Buổi 5. Còn khoảng 3 phút dự phòng cuối buổi (147–150).
 Nhắc các nhóm lưu lại bảng kiểm chứng, nhật ký AI và câu trả lời gốc của AI (ảnh chụp hoặc bản sao) — hôm nay không nộp, nhưng sẽ nộp kèm M3 sau Buổi 5. Trích dẫn “Đúng” có thể đưa vào tổng quan tài liệu sau khi nhóm đã đọc bài gốc; trích dẫn “Không xác minh được” thì không dùng.
 Phát giấy nhỏ cho phiếu ra về trong lúc chuyển slide.</a:t>
             </a:r>
@@ -4216,7 +4225,8 @@
           <a:p>
             <a:r>
               <a:rPr lang="en-US" dirty="0"/>
-              <a:t>Năm phút câu đố. Chiếu một câu trả lời AI mẫu có ba trích dẫn; cả lớp dự đoán có bao nhiêu trích dẫn đúng hoàn toàn bằng cách giơ 0, 1, 2 hoặc 3 ngón. Ghi kết quả dự đoán lên góc bảng và giữ đến cuối buổi.
+              <a:t>Thời gian: phút 8–13 của buổi học.
+Năm phút câu đố. Chiếu một câu trả lời AI mẫu có ba trích dẫn; cả lớp dự đoán có bao nhiêu trích dẫn đúng hoàn toàn bằng cách giơ 0, 1, 2 hoặc 3 ngón. Ghi kết quả dự đoán lên góc bảng và giữ đến cuối buổi.
 Điều quan trọng nhất: không công bố đáp án trong phần này. Đáp án sẽ được công bố ở cuối phần thực hành, sau khi các nhóm đã tự kiểm chứng.
 Chuẩn bị: góc bảng để ghi dự đoán; bản in phụ lục B của phiếu hoạt động cho các nhóm cần dùng ở phần thực hành.
 Lưu ý cho giảng viên: ba trích dẫn trong câu đố là trích dẫn 1, 2 và 4 của phụ lục B phiếu hoạt động “Kiểm chứng AI”.</a:t>
@@ -4490,7 +4500,8 @@
           <a:p>
             <a:r>
               <a:rPr lang="en-US" dirty="0"/>
-              <a:t>Ba mươi phút cho hai ý lớn: AI là gì (khoảng 15 phút) và lịch sử phát triển của AI (khoảng 12 phút), kết bằng thông điệp quan trọng nhất của phần này: AI tạo sinh tạo ra nội dung trông hợp lý, không tra cứu sự thật.
+              <a:t>Thời gian: phút 13–43 của buổi học.
+Ba mươi phút cho hai ý lớn: AI là gì (khoảng 15 phút) và lịch sử phát triển của AI (khoảng 12 phút), kết bằng thông điệp quan trọng nhất của phần này: AI tạo sinh tạo ra nội dung trông hợp lý, không tra cứu sự thật.
 Sinh viên ghi chép theo khung trên slide; giảng viên chỉ định 1–2 bạn trả lời các câu hỏi liên hệ.
 Chuẩn bị: viết sẵn hai công thức “Dữ liệu + Quy tắc → Đáp án” và “Dữ liệu + Đáp án → Quy tắc” ở góc bảng và giữ suốt buổi — phần kiểm tra nhanh và phần ảo giác đều quay lại hai công thức này.
 Lưu ý cho giảng viên: phần này dựa trên slide UEF Bài 3 #3 và #4 (đã sửa) cùng tài liệu học tập Bài 3, mục 3.1–3.2.</a:t>
@@ -4724,8 +4735,8 @@
         </p:nvSpPr>
         <p:spPr>
           <a:xfrm>
-            <a:off x="3840480" y="2103120"/>
-            <a:ext cx="6766560" cy="2194560"/>
+            <a:off x="3840480" y="2240280"/>
+            <a:ext cx="6766560" cy="2377440"/>
           </a:xfrm>
           <a:prstGeom prst="rect">
             <a:avLst/>
@@ -11682,7 +11693,7 @@
                 <a:ea typeface="Alexandria" pitchFamily="34" charset="-122"/>
                 <a:cs typeface="Alexandria" pitchFamily="34" charset="-120"/>
               </a:rPr>
-              <a:t>Luật hay học? 20 giây với bạn, rồi giơ tay</a:t>
+              <a:t>Luật hay học? Bàn với bạn, rồi giơ tay</a:t>
             </a:r>
             <a:endParaRPr lang="en-US" sz="3600" dirty="0"/>
           </a:p>
@@ -12135,7 +12146,7 @@
                 <a:ea typeface="Alexandria" pitchFamily="34" charset="-122"/>
                 <a:cs typeface="Alexandria" pitchFamily="34" charset="-120"/>
               </a:rPr>
-              <a:t>Mỗi tình huống: 20 giây với bạn bên cạnh → đếm 3–2–1 → cả lớp giơ tay</a:t>
+              <a:t>Mỗi tình huống: bàn với bạn bên cạnh → đếm 3–2–1 → cả lớp giơ tay</a:t>
             </a:r>
             <a:endParaRPr lang="en-US" sz="2600" dirty="0"/>
           </a:p>
@@ -12766,49 +12777,7 @@
       </p:sp>
       <p:sp>
         <p:nvSpPr>
-          <p:cNvPr id="8" name="Text 6"/>
-          <p:cNvSpPr txBox="1"/>
-          <p:nvPr/>
-        </p:nvSpPr>
-        <p:spPr>
-          <a:xfrm>
-            <a:off x="3840480" y="1417320"/>
-            <a:ext cx="6766560" cy="594360"/>
-          </a:xfrm>
-          <a:prstGeom prst="rect">
-            <a:avLst/>
-          </a:prstGeom>
-          <a:noFill/>
-          <a:ln/>
-        </p:spPr>
-        <p:txBody>
-          <a:bodyPr wrap="square" lIns="76200" tIns="76200" rIns="76200" bIns="76200" rtlCol="0" anchor="t"/>
-          <a:lstStyle/>
-          <a:p>
-            <a:pPr algn="l" indent="0" marL="0">
-              <a:lnSpc>
-                <a:spcPts val="3600"/>
-              </a:lnSpc>
-              <a:buNone/>
-            </a:pPr>
-            <a:r>
-              <a:rPr lang="en-US" sz="2800" b="1" dirty="0">
-                <a:solidFill>
-                  <a:srgbClr val="962B7C"/>
-                </a:solidFill>
-                <a:latin typeface="Alexandria" pitchFamily="34" charset="0"/>
-                <a:ea typeface="Alexandria" pitchFamily="34" charset="-122"/>
-                <a:cs typeface="Alexandria" pitchFamily="34" charset="-120"/>
-              </a:rPr>
-              <a:t>0–8 phút</a:t>
-            </a:r>
-            <a:endParaRPr lang="en-US" sz="2800" dirty="0"/>
-          </a:p>
-        </p:txBody>
-      </p:sp>
-      <p:sp>
-        <p:nvSpPr>
-          <p:cNvPr id="9" name="Text 0"/>
+          <p:cNvPr id="8" name="Text 0"/>
           <p:cNvSpPr/>
           <p:nvPr>
             <p:ph idx="100" type="title" hasCustomPrompt="1"/>
@@ -12816,17 +12785,17 @@
         </p:nvSpPr>
         <p:spPr>
           <a:xfrm>
-            <a:off x="3840480" y="2103120"/>
-            <a:ext cx="6766560" cy="2194560"/>
-          </a:xfrm>
-          <a:prstGeom prst="rect">
-            <a:avLst/>
-          </a:prstGeom>
-          <a:noFill/>
-          <a:ln/>
-        </p:spPr>
-        <p:txBody>
-          <a:bodyPr wrap="square" lIns="76200" tIns="76200" rIns="76200" bIns="76200" rtlCol="0" anchor="t"/>
+            <a:off x="3840480" y="2240280"/>
+            <a:ext cx="6766560" cy="2377440"/>
+          </a:xfrm>
+          <a:prstGeom prst="rect">
+            <a:avLst/>
+          </a:prstGeom>
+          <a:noFill/>
+          <a:ln/>
+        </p:spPr>
+        <p:txBody>
+          <a:bodyPr wrap="square" lIns="76200" tIns="76200" rIns="76200" bIns="76200" rtlCol="0" anchor="ctr"/>
           <a:lstStyle/>
           <a:p>
             <a:pPr algn="l" indent="0" marL="0">
@@ -14661,7 +14630,7 @@
                 <a:ea typeface="Alexandria" pitchFamily="34" charset="-122"/>
                 <a:cs typeface="Alexandria" pitchFamily="34" charset="-120"/>
               </a:rPr>
-              <a:t>15'</a:t>
+              <a:t>Nghỉ</a:t>
             </a:r>
             <a:endParaRPr lang="en-US" sz="9600" dirty="0"/>
           </a:p>
@@ -14703,7 +14672,7 @@
                 <a:ea typeface="Alexandria" pitchFamily="34" charset="-122"/>
                 <a:cs typeface="Alexandria" pitchFamily="34" charset="-120"/>
               </a:rPr>
-              <a:t>Giải lao 15 phút</a:t>
+              <a:t>Giải lao</a:t>
             </a:r>
             <a:endParaRPr lang="en-US" sz="4800" dirty="0"/>
           </a:p>
@@ -14965,49 +14934,7 @@
       </p:sp>
       <p:sp>
         <p:nvSpPr>
-          <p:cNvPr id="8" name="Text 6"/>
-          <p:cNvSpPr txBox="1"/>
-          <p:nvPr/>
-        </p:nvSpPr>
-        <p:spPr>
-          <a:xfrm>
-            <a:off x="3840480" y="1417320"/>
-            <a:ext cx="6766560" cy="594360"/>
-          </a:xfrm>
-          <a:prstGeom prst="rect">
-            <a:avLst/>
-          </a:prstGeom>
-          <a:noFill/>
-          <a:ln/>
-        </p:spPr>
-        <p:txBody>
-          <a:bodyPr wrap="square" lIns="76200" tIns="76200" rIns="76200" bIns="76200" rtlCol="0" anchor="t"/>
-          <a:lstStyle/>
-          <a:p>
-            <a:pPr algn="l" indent="0" marL="0">
-              <a:lnSpc>
-                <a:spcPts val="3600"/>
-              </a:lnSpc>
-              <a:buNone/>
-            </a:pPr>
-            <a:r>
-              <a:rPr lang="en-US" sz="2800" b="1" dirty="0">
-                <a:solidFill>
-                  <a:srgbClr val="962B7C"/>
-                </a:solidFill>
-                <a:latin typeface="Alexandria" pitchFamily="34" charset="0"/>
-                <a:ea typeface="Alexandria" pitchFamily="34" charset="-122"/>
-                <a:cs typeface="Alexandria" pitchFamily="34" charset="-120"/>
-              </a:rPr>
-              <a:t>63–83 phút</a:t>
-            </a:r>
-            <a:endParaRPr lang="en-US" sz="2800" dirty="0"/>
-          </a:p>
-        </p:txBody>
-      </p:sp>
-      <p:sp>
-        <p:nvSpPr>
-          <p:cNvPr id="9" name="Text 0"/>
+          <p:cNvPr id="8" name="Text 0"/>
           <p:cNvSpPr/>
           <p:nvPr>
             <p:ph idx="100" type="title" hasCustomPrompt="1"/>
@@ -15015,17 +14942,17 @@
         </p:nvSpPr>
         <p:spPr>
           <a:xfrm>
-            <a:off x="3840480" y="2103120"/>
-            <a:ext cx="6766560" cy="2194560"/>
-          </a:xfrm>
-          <a:prstGeom prst="rect">
-            <a:avLst/>
-          </a:prstGeom>
-          <a:noFill/>
-          <a:ln/>
-        </p:spPr>
-        <p:txBody>
-          <a:bodyPr wrap="square" lIns="76200" tIns="76200" rIns="76200" bIns="76200" rtlCol="0" anchor="t"/>
+            <a:off x="3840480" y="2240280"/>
+            <a:ext cx="6766560" cy="2377440"/>
+          </a:xfrm>
+          <a:prstGeom prst="rect">
+            <a:avLst/>
+          </a:prstGeom>
+          <a:noFill/>
+          <a:ln/>
+        </p:spPr>
+        <p:txBody>
+          <a:bodyPr wrap="square" lIns="76200" tIns="76200" rIns="76200" bIns="76200" rtlCol="0" anchor="ctr"/>
           <a:lstStyle/>
           <a:p>
             <a:pPr algn="l" indent="0" marL="0">
@@ -21479,49 +21406,7 @@
       </p:sp>
       <p:sp>
         <p:nvSpPr>
-          <p:cNvPr id="8" name="Text 6"/>
-          <p:cNvSpPr txBox="1"/>
-          <p:nvPr/>
-        </p:nvSpPr>
-        <p:spPr>
-          <a:xfrm>
-            <a:off x="3840480" y="1417320"/>
-            <a:ext cx="6766560" cy="594360"/>
-          </a:xfrm>
-          <a:prstGeom prst="rect">
-            <a:avLst/>
-          </a:prstGeom>
-          <a:noFill/>
-          <a:ln/>
-        </p:spPr>
-        <p:txBody>
-          <a:bodyPr wrap="square" lIns="76200" tIns="76200" rIns="76200" bIns="76200" rtlCol="0" anchor="t"/>
-          <a:lstStyle/>
-          <a:p>
-            <a:pPr algn="l" indent="0" marL="0">
-              <a:lnSpc>
-                <a:spcPts val="3600"/>
-              </a:lnSpc>
-              <a:buNone/>
-            </a:pPr>
-            <a:r>
-              <a:rPr lang="en-US" sz="2800" b="1" dirty="0">
-                <a:solidFill>
-                  <a:srgbClr val="962B7C"/>
-                </a:solidFill>
-                <a:latin typeface="Alexandria" pitchFamily="34" charset="0"/>
-                <a:ea typeface="Alexandria" pitchFamily="34" charset="-122"/>
-                <a:cs typeface="Alexandria" pitchFamily="34" charset="-120"/>
-              </a:rPr>
-              <a:t>83–95 phút</a:t>
-            </a:r>
-            <a:endParaRPr lang="en-US" sz="2800" dirty="0"/>
-          </a:p>
-        </p:txBody>
-      </p:sp>
-      <p:sp>
-        <p:nvSpPr>
-          <p:cNvPr id="9" name="Text 0"/>
+          <p:cNvPr id="8" name="Text 0"/>
           <p:cNvSpPr/>
           <p:nvPr>
             <p:ph idx="100" type="title" hasCustomPrompt="1"/>
@@ -21529,17 +21414,17 @@
         </p:nvSpPr>
         <p:spPr>
           <a:xfrm>
-            <a:off x="3840480" y="2103120"/>
-            <a:ext cx="6766560" cy="2194560"/>
-          </a:xfrm>
-          <a:prstGeom prst="rect">
-            <a:avLst/>
-          </a:prstGeom>
-          <a:noFill/>
-          <a:ln/>
-        </p:spPr>
-        <p:txBody>
-          <a:bodyPr wrap="square" lIns="76200" tIns="76200" rIns="76200" bIns="76200" rtlCol="0" anchor="t"/>
+            <a:off x="3840480" y="2240280"/>
+            <a:ext cx="6766560" cy="2377440"/>
+          </a:xfrm>
+          <a:prstGeom prst="rect">
+            <a:avLst/>
+          </a:prstGeom>
+          <a:noFill/>
+          <a:ln/>
+        </p:spPr>
+        <p:txBody>
+          <a:bodyPr wrap="square" lIns="76200" tIns="76200" rIns="76200" bIns="76200" rtlCol="0" anchor="ctr"/>
           <a:lstStyle/>
           <a:p>
             <a:pPr algn="l" indent="0" marL="0">
@@ -25140,49 +25025,7 @@
       </p:sp>
       <p:sp>
         <p:nvSpPr>
-          <p:cNvPr id="8" name="Text 6"/>
-          <p:cNvSpPr txBox="1"/>
-          <p:nvPr/>
-        </p:nvSpPr>
-        <p:spPr>
-          <a:xfrm>
-            <a:off x="3840480" y="1417320"/>
-            <a:ext cx="6766560" cy="594360"/>
-          </a:xfrm>
-          <a:prstGeom prst="rect">
-            <a:avLst/>
-          </a:prstGeom>
-          <a:noFill/>
-          <a:ln/>
-        </p:spPr>
-        <p:txBody>
-          <a:bodyPr wrap="square" lIns="76200" tIns="76200" rIns="76200" bIns="76200" rtlCol="0" anchor="t"/>
-          <a:lstStyle/>
-          <a:p>
-            <a:pPr algn="l" indent="0" marL="0">
-              <a:lnSpc>
-                <a:spcPts val="3600"/>
-              </a:lnSpc>
-              <a:buNone/>
-            </a:pPr>
-            <a:r>
-              <a:rPr lang="en-US" sz="2800" b="1" dirty="0">
-                <a:solidFill>
-                  <a:srgbClr val="962B7C"/>
-                </a:solidFill>
-                <a:latin typeface="Alexandria" pitchFamily="34" charset="0"/>
-                <a:ea typeface="Alexandria" pitchFamily="34" charset="-122"/>
-                <a:cs typeface="Alexandria" pitchFamily="34" charset="-120"/>
-              </a:rPr>
-              <a:t>95–140 phút</a:t>
-            </a:r>
-            <a:endParaRPr lang="en-US" sz="2800" dirty="0"/>
-          </a:p>
-        </p:txBody>
-      </p:sp>
-      <p:sp>
-        <p:nvSpPr>
-          <p:cNvPr id="9" name="Text 0"/>
+          <p:cNvPr id="8" name="Text 0"/>
           <p:cNvSpPr/>
           <p:nvPr>
             <p:ph idx="100" type="title" hasCustomPrompt="1"/>
@@ -25190,17 +25033,17 @@
         </p:nvSpPr>
         <p:spPr>
           <a:xfrm>
-            <a:off x="3840480" y="2103120"/>
-            <a:ext cx="6766560" cy="2194560"/>
-          </a:xfrm>
-          <a:prstGeom prst="rect">
-            <a:avLst/>
-          </a:prstGeom>
-          <a:noFill/>
-          <a:ln/>
-        </p:spPr>
-        <p:txBody>
-          <a:bodyPr wrap="square" lIns="76200" tIns="76200" rIns="76200" bIns="76200" rtlCol="0" anchor="t"/>
+            <a:off x="3840480" y="2240280"/>
+            <a:ext cx="6766560" cy="2377440"/>
+          </a:xfrm>
+          <a:prstGeom prst="rect">
+            <a:avLst/>
+          </a:prstGeom>
+          <a:noFill/>
+          <a:ln/>
+        </p:spPr>
+        <p:txBody>
+          <a:bodyPr wrap="square" lIns="76200" tIns="76200" rIns="76200" bIns="76200" rtlCol="0" anchor="ctr"/>
           <a:lstStyle/>
           <a:p>
             <a:pPr algn="l" indent="0" marL="0">
@@ -25389,7 +25232,7 @@
                 <a:ea typeface="Alexandria" pitchFamily="34" charset="-122"/>
                 <a:cs typeface="Alexandria" pitchFamily="34" charset="-120"/>
               </a:rPr>
-              <a:t>Kiểm chứng AI (45'): hỏi một chatbot, rồi kiểm chứng từng trích dẫn nó đưa ra</a:t>
+              <a:t>Kiểm chứng AI: hỏi một chatbot, rồi kiểm chứng từng trích dẫn nó đưa ra</a:t>
             </a:r>
             <a:endParaRPr lang="en-US" sz="3400" dirty="0"/>
           </a:p>
@@ -25426,7 +25269,7 @@
         <p:spPr>
           <a:xfrm>
             <a:off x="640080" y="1828800"/>
-            <a:ext cx="1280160" cy="548640"/>
+            <a:ext cx="731520" cy="548640"/>
           </a:xfrm>
           <a:prstGeom prst="roundRect">
             <a:avLst>
@@ -25448,7 +25291,7 @@
         <p:spPr>
           <a:xfrm>
             <a:off x="640080" y="1828800"/>
-            <a:ext cx="1280160" cy="548640"/>
+            <a:ext cx="731520" cy="548640"/>
           </a:xfrm>
           <a:prstGeom prst="rect">
             <a:avLst/>
@@ -25475,7 +25318,7 @@
                 <a:ea typeface="Alexandria" pitchFamily="34" charset="-122"/>
                 <a:cs typeface="Alexandria" pitchFamily="34" charset="-120"/>
               </a:rPr>
-              <a:t>8'</a:t>
+              <a:t>1</a:t>
             </a:r>
             <a:endParaRPr lang="en-US" sz="2400" dirty="0"/>
           </a:p>
@@ -25489,8 +25332,8 @@
         </p:nvSpPr>
         <p:spPr>
           <a:xfrm>
-            <a:off x="2103120" y="1783080"/>
-            <a:ext cx="9372600" cy="640080"/>
+            <a:off x="1554480" y="1783080"/>
+            <a:ext cx="9921240" cy="640080"/>
           </a:xfrm>
           <a:prstGeom prst="rect">
             <a:avLst/>
@@ -25571,7 +25414,7 @@
         <p:spPr>
           <a:xfrm>
             <a:off x="640080" y="2606040"/>
-            <a:ext cx="1280160" cy="548640"/>
+            <a:ext cx="731520" cy="548640"/>
           </a:xfrm>
           <a:prstGeom prst="roundRect">
             <a:avLst>
@@ -25593,7 +25436,7 @@
         <p:spPr>
           <a:xfrm>
             <a:off x="640080" y="2606040"/>
-            <a:ext cx="1280160" cy="548640"/>
+            <a:ext cx="731520" cy="548640"/>
           </a:xfrm>
           <a:prstGeom prst="rect">
             <a:avLst/>
@@ -25620,7 +25463,7 @@
                 <a:ea typeface="Alexandria" pitchFamily="34" charset="-122"/>
                 <a:cs typeface="Alexandria" pitchFamily="34" charset="-120"/>
               </a:rPr>
-              <a:t>22'</a:t>
+              <a:t>2</a:t>
             </a:r>
             <a:endParaRPr lang="en-US" sz="2400" dirty="0"/>
           </a:p>
@@ -25634,8 +25477,8 @@
         </p:nvSpPr>
         <p:spPr>
           <a:xfrm>
-            <a:off x="2103120" y="2560320"/>
-            <a:ext cx="9372600" cy="640080"/>
+            <a:off x="1554480" y="2560320"/>
+            <a:ext cx="9921240" cy="640080"/>
           </a:xfrm>
           <a:prstGeom prst="rect">
             <a:avLst/>
@@ -25716,7 +25559,7 @@
         <p:spPr>
           <a:xfrm>
             <a:off x="640080" y="3383280"/>
-            <a:ext cx="1280160" cy="548640"/>
+            <a:ext cx="731520" cy="548640"/>
           </a:xfrm>
           <a:prstGeom prst="roundRect">
             <a:avLst>
@@ -25738,7 +25581,7 @@
         <p:spPr>
           <a:xfrm>
             <a:off x="640080" y="3383280"/>
-            <a:ext cx="1280160" cy="548640"/>
+            <a:ext cx="731520" cy="548640"/>
           </a:xfrm>
           <a:prstGeom prst="rect">
             <a:avLst/>
@@ -25765,7 +25608,7 @@
                 <a:ea typeface="Alexandria" pitchFamily="34" charset="-122"/>
                 <a:cs typeface="Alexandria" pitchFamily="34" charset="-120"/>
               </a:rPr>
-              <a:t>7'</a:t>
+              <a:t>3</a:t>
             </a:r>
             <a:endParaRPr lang="en-US" sz="2400" dirty="0"/>
           </a:p>
@@ -25779,8 +25622,8 @@
         </p:nvSpPr>
         <p:spPr>
           <a:xfrm>
-            <a:off x="2103120" y="3337560"/>
-            <a:ext cx="9372600" cy="640080"/>
+            <a:off x="1554480" y="3337560"/>
+            <a:ext cx="9921240" cy="640080"/>
           </a:xfrm>
           <a:prstGeom prst="rect">
             <a:avLst/>
@@ -25861,7 +25704,7 @@
         <p:spPr>
           <a:xfrm>
             <a:off x="640080" y="4160520"/>
-            <a:ext cx="1280160" cy="548640"/>
+            <a:ext cx="731520" cy="548640"/>
           </a:xfrm>
           <a:prstGeom prst="roundRect">
             <a:avLst>
@@ -25883,7 +25726,7 @@
         <p:spPr>
           <a:xfrm>
             <a:off x="640080" y="4160520"/>
-            <a:ext cx="1280160" cy="548640"/>
+            <a:ext cx="731520" cy="548640"/>
           </a:xfrm>
           <a:prstGeom prst="rect">
             <a:avLst/>
@@ -25910,7 +25753,7 @@
                 <a:ea typeface="Alexandria" pitchFamily="34" charset="-122"/>
                 <a:cs typeface="Alexandria" pitchFamily="34" charset="-120"/>
               </a:rPr>
-              <a:t>8'</a:t>
+              <a:t>4</a:t>
             </a:r>
             <a:endParaRPr lang="en-US" sz="2400" dirty="0"/>
           </a:p>
@@ -25924,8 +25767,8 @@
         </p:nvSpPr>
         <p:spPr>
           <a:xfrm>
-            <a:off x="2103120" y="4114800"/>
-            <a:ext cx="9372600" cy="640080"/>
+            <a:off x="1554480" y="4114800"/>
+            <a:ext cx="9921240" cy="640080"/>
           </a:xfrm>
           <a:prstGeom prst="rect">
             <a:avLst/>
@@ -27569,49 +27412,7 @@
       </p:sp>
       <p:sp>
         <p:nvSpPr>
-          <p:cNvPr id="8" name="Text 6"/>
-          <p:cNvSpPr txBox="1"/>
-          <p:nvPr/>
-        </p:nvSpPr>
-        <p:spPr>
-          <a:xfrm>
-            <a:off x="3840480" y="1417320"/>
-            <a:ext cx="6766560" cy="594360"/>
-          </a:xfrm>
-          <a:prstGeom prst="rect">
-            <a:avLst/>
-          </a:prstGeom>
-          <a:noFill/>
-          <a:ln/>
-        </p:spPr>
-        <p:txBody>
-          <a:bodyPr wrap="square" lIns="76200" tIns="76200" rIns="76200" bIns="76200" rtlCol="0" anchor="t"/>
-          <a:lstStyle/>
-          <a:p>
-            <a:pPr algn="l" indent="0" marL="0">
-              <a:lnSpc>
-                <a:spcPts val="3600"/>
-              </a:lnSpc>
-              <a:buNone/>
-            </a:pPr>
-            <a:r>
-              <a:rPr lang="en-US" sz="2800" b="1" dirty="0">
-                <a:solidFill>
-                  <a:srgbClr val="962B7C"/>
-                </a:solidFill>
-                <a:latin typeface="Alexandria" pitchFamily="34" charset="0"/>
-                <a:ea typeface="Alexandria" pitchFamily="34" charset="-122"/>
-                <a:cs typeface="Alexandria" pitchFamily="34" charset="-120"/>
-              </a:rPr>
-              <a:t>140–147 phút</a:t>
-            </a:r>
-            <a:endParaRPr lang="en-US" sz="2800" dirty="0"/>
-          </a:p>
-        </p:txBody>
-      </p:sp>
-      <p:sp>
-        <p:nvSpPr>
-          <p:cNvPr id="9" name="Text 0"/>
+          <p:cNvPr id="8" name="Text 0"/>
           <p:cNvSpPr/>
           <p:nvPr>
             <p:ph idx="100" type="title" hasCustomPrompt="1"/>
@@ -27619,17 +27420,17 @@
         </p:nvSpPr>
         <p:spPr>
           <a:xfrm>
-            <a:off x="3840480" y="2103120"/>
-            <a:ext cx="6766560" cy="2194560"/>
-          </a:xfrm>
-          <a:prstGeom prst="rect">
-            <a:avLst/>
-          </a:prstGeom>
-          <a:noFill/>
-          <a:ln/>
-        </p:spPr>
-        <p:txBody>
-          <a:bodyPr wrap="square" lIns="76200" tIns="76200" rIns="76200" bIns="76200" rtlCol="0" anchor="t"/>
+            <a:off x="3840480" y="2240280"/>
+            <a:ext cx="6766560" cy="2377440"/>
+          </a:xfrm>
+          <a:prstGeom prst="rect">
+            <a:avLst/>
+          </a:prstGeom>
+          <a:noFill/>
+          <a:ln/>
+        </p:spPr>
+        <p:txBody>
+          <a:bodyPr wrap="square" lIns="76200" tIns="76200" rIns="76200" bIns="76200" rtlCol="0" anchor="ctr"/>
           <a:lstStyle/>
           <a:p>
             <a:pPr algn="l" indent="0" marL="0">
@@ -31153,49 +30954,7 @@
       </p:sp>
       <p:sp>
         <p:nvSpPr>
-          <p:cNvPr id="8" name="Text 6"/>
-          <p:cNvSpPr txBox="1"/>
-          <p:nvPr/>
-        </p:nvSpPr>
-        <p:spPr>
-          <a:xfrm>
-            <a:off x="3840480" y="1417320"/>
-            <a:ext cx="6766560" cy="594360"/>
-          </a:xfrm>
-          <a:prstGeom prst="rect">
-            <a:avLst/>
-          </a:prstGeom>
-          <a:noFill/>
-          <a:ln/>
-        </p:spPr>
-        <p:txBody>
-          <a:bodyPr wrap="square" lIns="76200" tIns="76200" rIns="76200" bIns="76200" rtlCol="0" anchor="t"/>
-          <a:lstStyle/>
-          <a:p>
-            <a:pPr algn="l" indent="0" marL="0">
-              <a:lnSpc>
-                <a:spcPts val="3600"/>
-              </a:lnSpc>
-              <a:buNone/>
-            </a:pPr>
-            <a:r>
-              <a:rPr lang="en-US" sz="2800" b="1" dirty="0">
-                <a:solidFill>
-                  <a:srgbClr val="962B7C"/>
-                </a:solidFill>
-                <a:latin typeface="Alexandria" pitchFamily="34" charset="0"/>
-                <a:ea typeface="Alexandria" pitchFamily="34" charset="-122"/>
-                <a:cs typeface="Alexandria" pitchFamily="34" charset="-120"/>
-              </a:rPr>
-              <a:t>8–13 phút</a:t>
-            </a:r>
-            <a:endParaRPr lang="en-US" sz="2800" dirty="0"/>
-          </a:p>
-        </p:txBody>
-      </p:sp>
-      <p:sp>
-        <p:nvSpPr>
-          <p:cNvPr id="9" name="Text 0"/>
+          <p:cNvPr id="8" name="Text 0"/>
           <p:cNvSpPr/>
           <p:nvPr>
             <p:ph idx="100" type="title" hasCustomPrompt="1"/>
@@ -31203,17 +30962,17 @@
         </p:nvSpPr>
         <p:spPr>
           <a:xfrm>
-            <a:off x="3840480" y="2103120"/>
-            <a:ext cx="6766560" cy="2194560"/>
-          </a:xfrm>
-          <a:prstGeom prst="rect">
-            <a:avLst/>
-          </a:prstGeom>
-          <a:noFill/>
-          <a:ln/>
-        </p:spPr>
-        <p:txBody>
-          <a:bodyPr wrap="square" lIns="76200" tIns="76200" rIns="76200" bIns="76200" rtlCol="0" anchor="t"/>
+            <a:off x="3840480" y="2240280"/>
+            <a:ext cx="6766560" cy="2377440"/>
+          </a:xfrm>
+          <a:prstGeom prst="rect">
+            <a:avLst/>
+          </a:prstGeom>
+          <a:noFill/>
+          <a:ln/>
+        </p:spPr>
+        <p:txBody>
+          <a:bodyPr wrap="square" lIns="76200" tIns="76200" rIns="76200" bIns="76200" rtlCol="0" anchor="ctr"/>
           <a:lstStyle/>
           <a:p>
             <a:pPr algn="l" indent="0" marL="0">
@@ -32990,49 +32749,7 @@
       </p:sp>
       <p:sp>
         <p:nvSpPr>
-          <p:cNvPr id="8" name="Text 6"/>
-          <p:cNvSpPr txBox="1"/>
-          <p:nvPr/>
-        </p:nvSpPr>
-        <p:spPr>
-          <a:xfrm>
-            <a:off x="3840480" y="1417320"/>
-            <a:ext cx="6766560" cy="594360"/>
-          </a:xfrm>
-          <a:prstGeom prst="rect">
-            <a:avLst/>
-          </a:prstGeom>
-          <a:noFill/>
-          <a:ln/>
-        </p:spPr>
-        <p:txBody>
-          <a:bodyPr wrap="square" lIns="76200" tIns="76200" rIns="76200" bIns="76200" rtlCol="0" anchor="t"/>
-          <a:lstStyle/>
-          <a:p>
-            <a:pPr algn="l" indent="0" marL="0">
-              <a:lnSpc>
-                <a:spcPts val="3600"/>
-              </a:lnSpc>
-              <a:buNone/>
-            </a:pPr>
-            <a:r>
-              <a:rPr lang="en-US" sz="2800" b="1" dirty="0">
-                <a:solidFill>
-                  <a:srgbClr val="962B7C"/>
-                </a:solidFill>
-                <a:latin typeface="Alexandria" pitchFamily="34" charset="0"/>
-                <a:ea typeface="Alexandria" pitchFamily="34" charset="-122"/>
-                <a:cs typeface="Alexandria" pitchFamily="34" charset="-120"/>
-              </a:rPr>
-              <a:t>13–43 phút</a:t>
-            </a:r>
-            <a:endParaRPr lang="en-US" sz="2800" dirty="0"/>
-          </a:p>
-        </p:txBody>
-      </p:sp>
-      <p:sp>
-        <p:nvSpPr>
-          <p:cNvPr id="9" name="Text 0"/>
+          <p:cNvPr id="8" name="Text 0"/>
           <p:cNvSpPr/>
           <p:nvPr>
             <p:ph idx="100" type="title" hasCustomPrompt="1"/>
@@ -33040,17 +32757,17 @@
         </p:nvSpPr>
         <p:spPr>
           <a:xfrm>
-            <a:off x="3840480" y="2103120"/>
-            <a:ext cx="6766560" cy="2194560"/>
-          </a:xfrm>
-          <a:prstGeom prst="rect">
-            <a:avLst/>
-          </a:prstGeom>
-          <a:noFill/>
-          <a:ln/>
-        </p:spPr>
-        <p:txBody>
-          <a:bodyPr wrap="square" lIns="76200" tIns="76200" rIns="76200" bIns="76200" rtlCol="0" anchor="t"/>
+            <a:off x="3840480" y="2240280"/>
+            <a:ext cx="6766560" cy="2377440"/>
+          </a:xfrm>
+          <a:prstGeom prst="rect">
+            <a:avLst/>
+          </a:prstGeom>
+          <a:noFill/>
+          <a:ln/>
+        </p:spPr>
+        <p:txBody>
+          <a:bodyPr wrap="square" lIns="76200" tIns="76200" rIns="76200" bIns="76200" rtlCol="0" anchor="ctr"/>
           <a:lstStyle/>
           <a:p>
             <a:pPr algn="l" indent="0" marL="0">
